--- a/public/fun/cards/office/office-42.pptx
+++ b/public/fun/cards/office/office-42.pptx
@@ -3085,7 +3085,7 @@
     <p:bg>
       <p:bgPr>
         <a:solidFill>
-          <a:srgbClr val="FBF8F2"/>
+          <a:srgbClr val="F3F4F6"/>
         </a:solidFill>
         <a:effectLst/>
       </p:bgPr>
@@ -3105,8 +3105,8 @@
         </p:nvSpPr>
         <p:spPr>
           <a:xfrm>
-            <a:off x="360000" y="201600"/>
-            <a:ext cx="2520000" cy="100800"/>
+            <a:off x="252000" y="223200"/>
+            <a:ext cx="2016000" cy="133351"/>
           </a:xfrm>
           <a:prstGeom prst="rect">
             <a:avLst/>
@@ -3119,15 +3119,15 @@
           </a:bodyPr>
           <a:lstStyle/>
           <a:p>
-            <a:pPr algn="ctr">
+            <a:pPr algn="l">
               <a:lnSpc>
                 <a:spcPts val="1015"/>
               </a:lnSpc>
             </a:pPr>
             <a:r>
-              <a:rPr sz="700" b="1" spc="300">
+              <a:rPr sz="700" b="1" spc="200">
                 <a:solidFill>
-                  <a:srgbClr val="936466"/>
+                  <a:srgbClr val="6B7280"/>
                 </a:solidFill>
                 <a:latin typeface="맑은 고딕"/>
                 <a:ea typeface="맑은 고딕"/>
@@ -3139,105 +3139,14 @@
       </p:sp>
       <p:sp>
         <p:nvSpPr>
-          <p:cNvPr id="3" name="Oval 2"/>
-          <p:cNvSpPr/>
+          <p:cNvPr id="3" name="텍스트"/>
+          <p:cNvSpPr txBox="1"/>
           <p:nvPr/>
         </p:nvSpPr>
         <p:spPr>
           <a:xfrm>
-            <a:off x="1561680" y="415440"/>
-            <a:ext cx="116640" cy="116640"/>
-          </a:xfrm>
-          <a:prstGeom prst="ellipse">
-            <a:avLst/>
-          </a:prstGeom>
-          <a:solidFill>
-            <a:srgbClr val="3B915F"/>
-          </a:solidFill>
-          <a:ln>
-            <a:noFill/>
-          </a:ln>
-        </p:spPr>
-        <p:txBody>
-          <a:bodyPr rtlCol="0" anchor="ctr"/>
-          <a:lstStyle/>
-          <a:p>
-            <a:pPr algn="ctr"/>
-          </a:p>
-        </p:txBody>
-      </p:sp>
-      <p:sp>
-        <p:nvSpPr>
-          <p:cNvPr id="4" name="Rounded Rectangle 3"/>
-          <p:cNvSpPr/>
-          <p:nvPr/>
-        </p:nvSpPr>
-        <p:spPr>
-          <a:xfrm>
-            <a:off x="1591920" y="529920"/>
-            <a:ext cx="56160" cy="34560"/>
-          </a:xfrm>
-          <a:prstGeom prst="roundRect">
-            <a:avLst>
-              <a:gd name="adj" fmla="val 18750"/>
-            </a:avLst>
-          </a:prstGeom>
-          <a:solidFill>
-            <a:srgbClr val="C8E0D2"/>
-          </a:solidFill>
-          <a:ln>
-            <a:noFill/>
-          </a:ln>
-        </p:spPr>
-        <p:txBody>
-          <a:bodyPr rtlCol="0" anchor="ctr"/>
-          <a:lstStyle/>
-          <a:p>
-            <a:pPr algn="ctr"/>
-          </a:p>
-        </p:txBody>
-      </p:sp>
-      <p:sp>
-        <p:nvSpPr>
-          <p:cNvPr id="5" name="Rounded Rectangle 4"/>
-          <p:cNvSpPr/>
-          <p:nvPr/>
-        </p:nvSpPr>
-        <p:spPr>
-          <a:xfrm>
-            <a:off x="1600560" y="570960"/>
-            <a:ext cx="38880" cy="19440"/>
-          </a:xfrm>
-          <a:prstGeom prst="roundRect">
-            <a:avLst>
-              <a:gd name="adj" fmla="val 33333"/>
-            </a:avLst>
-          </a:prstGeom>
-          <a:solidFill>
-            <a:srgbClr val="C8E0D2"/>
-          </a:solidFill>
-          <a:ln>
-            <a:noFill/>
-          </a:ln>
-        </p:spPr>
-        <p:txBody>
-          <a:bodyPr rtlCol="0" anchor="ctr"/>
-          <a:lstStyle/>
-          <a:p>
-            <a:pPr algn="ctr"/>
-          </a:p>
-        </p:txBody>
-      </p:sp>
-      <p:sp>
-        <p:nvSpPr>
-          <p:cNvPr id="6" name="텍스트"/>
-          <p:cNvSpPr txBox="1"/>
-          <p:nvPr/>
-        </p:nvSpPr>
-        <p:spPr>
-          <a:xfrm>
-            <a:off x="360000" y="684000"/>
-            <a:ext cx="2520000" cy="313692"/>
+            <a:off x="252000" y="468000"/>
+            <a:ext cx="2520000" cy="360000"/>
           </a:xfrm>
           <a:prstGeom prst="rect">
             <a:avLst/>
@@ -3250,18 +3159,18 @@
           </a:bodyPr>
           <a:lstStyle/>
           <a:p>
-            <a:pPr algn="ctr">
+            <a:pPr algn="l">
               <a:lnSpc>
-                <a:spcPts val="2755"/>
+                <a:spcPts val="3190"/>
               </a:lnSpc>
             </a:pPr>
             <a:r>
-              <a:rPr sz="1900" b="1" spc="50">
+              <a:rPr sz="2200" b="1">
                 <a:solidFill>
-                  <a:srgbClr val="5B151B"/>
+                  <a:srgbClr val="12151C"/>
                 </a:solidFill>
-                <a:latin typeface="바탕"/>
-                <a:ea typeface="바탕"/>
+                <a:latin typeface="맑은 고딕"/>
+                <a:ea typeface="맑은 고딕"/>
               </a:rPr>
               <a:t>봉기태</a:t>
             </a:r>
@@ -3270,14 +3179,14 @@
       </p:sp>
       <p:sp>
         <p:nvSpPr>
-          <p:cNvPr id="7" name="텍스트"/>
+          <p:cNvPr id="4" name="텍스트"/>
           <p:cNvSpPr txBox="1"/>
           <p:nvPr/>
         </p:nvSpPr>
         <p:spPr>
           <a:xfrm>
-            <a:off x="360000" y="1051200"/>
-            <a:ext cx="2520000" cy="122400"/>
+            <a:off x="252000" y="871200"/>
+            <a:ext cx="2520000" cy="171451"/>
           </a:xfrm>
           <a:prstGeom prst="rect">
             <a:avLst/>
@@ -3290,15 +3199,15 @@
           </a:bodyPr>
           <a:lstStyle/>
           <a:p>
-            <a:pPr algn="ctr">
+            <a:pPr algn="l">
               <a:lnSpc>
-                <a:spcPts val="1232"/>
+                <a:spcPts val="1305"/>
               </a:lnSpc>
             </a:pPr>
             <a:r>
-              <a:rPr sz="850" b="1">
+              <a:rPr sz="900" b="0">
                 <a:solidFill>
-                  <a:srgbClr val="327B51"/>
+                  <a:srgbClr val="6B7280"/>
                 </a:solidFill>
                 <a:latin typeface="맑은 고딕"/>
                 <a:ea typeface="맑은 고딕"/>
@@ -3310,43 +3219,14 @@
       </p:sp>
       <p:sp>
         <p:nvSpPr>
-          <p:cNvPr id="8" name="Rectangle 7"/>
-          <p:cNvSpPr/>
+          <p:cNvPr id="5" name="텍스트"/>
+          <p:cNvSpPr txBox="1"/>
           <p:nvPr/>
         </p:nvSpPr>
         <p:spPr>
           <a:xfrm>
-            <a:off x="1512000" y="1245600"/>
-            <a:ext cx="216000" cy="10800"/>
-          </a:xfrm>
-          <a:prstGeom prst="rect">
-            <a:avLst/>
-          </a:prstGeom>
-          <a:solidFill>
-            <a:srgbClr val="3B915F"/>
-          </a:solidFill>
-          <a:ln>
-            <a:noFill/>
-          </a:ln>
-        </p:spPr>
-        <p:txBody>
-          <a:bodyPr rtlCol="0" anchor="ctr"/>
-          <a:lstStyle/>
-          <a:p>
-            <a:pPr algn="ctr"/>
-          </a:p>
-        </p:txBody>
-      </p:sp>
-      <p:sp>
-        <p:nvSpPr>
-          <p:cNvPr id="9" name="텍스트"/>
-          <p:cNvSpPr txBox="1"/>
-          <p:nvPr/>
-        </p:nvSpPr>
-        <p:spPr>
-          <a:xfrm>
-            <a:off x="360000" y="1339200"/>
-            <a:ext cx="2520000" cy="108000"/>
+            <a:off x="252000" y="1216800"/>
+            <a:ext cx="2520000" cy="129541"/>
           </a:xfrm>
           <a:prstGeom prst="rect">
             <a:avLst/>
@@ -3359,34 +3239,63 @@
           </a:bodyPr>
           <a:lstStyle/>
           <a:p>
-            <a:pPr algn="ctr">
+            <a:pPr algn="l">
               <a:lnSpc>
-                <a:spcPts val="1015"/>
+                <a:spcPts val="986"/>
               </a:lnSpc>
             </a:pPr>
             <a:r>
-              <a:rPr sz="700" b="0">
+              <a:rPr sz="680" b="0">
                 <a:solidFill>
-                  <a:srgbClr val="5B151B"/>
+                  <a:srgbClr val="6B7280"/>
                 </a:solidFill>
                 <a:latin typeface="맑은 고딕"/>
                 <a:ea typeface="맑은 고딕"/>
               </a:rPr>
-              <a:t>010-1234-5678   ·   name@example.com</a:t>
-            </a:r>
-          </a:p>
-        </p:txBody>
-      </p:sp>
-      <p:sp>
-        <p:nvSpPr>
-          <p:cNvPr id="10" name="텍스트"/>
+              <a:t>주소를 입력해 주세요</a:t>
+            </a:r>
+          </a:p>
+        </p:txBody>
+      </p:sp>
+      <p:sp>
+        <p:nvSpPr>
+          <p:cNvPr id="6" name="Rectangle 5"/>
+          <p:cNvSpPr/>
+          <p:nvPr/>
+        </p:nvSpPr>
+        <p:spPr>
+          <a:xfrm>
+            <a:off x="0" y="1476000"/>
+            <a:ext cx="3240000" cy="324000"/>
+          </a:xfrm>
+          <a:prstGeom prst="rect">
+            <a:avLst/>
+          </a:prstGeom>
+          <a:solidFill>
+            <a:srgbClr val="B66DFF"/>
+          </a:solidFill>
+          <a:ln>
+            <a:noFill/>
+          </a:ln>
+        </p:spPr>
+        <p:txBody>
+          <a:bodyPr rtlCol="0" anchor="ctr"/>
+          <a:lstStyle/>
+          <a:p>
+            <a:pPr algn="ctr"/>
+          </a:p>
+        </p:txBody>
+      </p:sp>
+      <p:sp>
+        <p:nvSpPr>
+          <p:cNvPr id="7" name="텍스트"/>
           <p:cNvSpPr txBox="1"/>
           <p:nvPr/>
         </p:nvSpPr>
         <p:spPr>
           <a:xfrm>
-            <a:off x="360000" y="1468800"/>
-            <a:ext cx="2520000" cy="108000"/>
+            <a:off x="252000" y="1569600"/>
+            <a:ext cx="1296000" cy="133351"/>
           </a:xfrm>
           <a:prstGeom prst="rect">
             <a:avLst/>
@@ -3399,20 +3308,60 @@
           </a:bodyPr>
           <a:lstStyle/>
           <a:p>
-            <a:pPr algn="ctr">
+            <a:pPr algn="l">
               <a:lnSpc>
                 <a:spcPts val="1015"/>
               </a:lnSpc>
             </a:pPr>
             <a:r>
-              <a:rPr sz="700" b="0">
+              <a:rPr sz="700" b="1">
                 <a:solidFill>
-                  <a:srgbClr val="936466"/>
+                  <a:srgbClr val="12151C"/>
                 </a:solidFill>
                 <a:latin typeface="맑은 고딕"/>
                 <a:ea typeface="맑은 고딕"/>
               </a:rPr>
-              <a:t>주소를 입력해 주세요</a:t>
+              <a:t>010-1234-5678</a:t>
+            </a:r>
+          </a:p>
+        </p:txBody>
+      </p:sp>
+      <p:sp>
+        <p:nvSpPr>
+          <p:cNvPr id="8" name="텍스트"/>
+          <p:cNvSpPr txBox="1"/>
+          <p:nvPr/>
+        </p:nvSpPr>
+        <p:spPr>
+          <a:xfrm>
+            <a:off x="1656000" y="1569600"/>
+            <a:ext cx="1368000" cy="133351"/>
+          </a:xfrm>
+          <a:prstGeom prst="rect">
+            <a:avLst/>
+          </a:prstGeom>
+          <a:noFill/>
+        </p:spPr>
+        <p:txBody>
+          <a:bodyPr wrap="square" lIns="0" rIns="0" tIns="0" bIns="0" anchor="t">
+            <a:spAutoFit/>
+          </a:bodyPr>
+          <a:lstStyle/>
+          <a:p>
+            <a:pPr algn="l">
+              <a:lnSpc>
+                <a:spcPts val="1015"/>
+              </a:lnSpc>
+            </a:pPr>
+            <a:r>
+              <a:rPr sz="700" b="1">
+                <a:solidFill>
+                  <a:srgbClr val="12151C"/>
+                </a:solidFill>
+                <a:latin typeface="맑은 고딕"/>
+                <a:ea typeface="맑은 고딕"/>
+              </a:rPr>
+              <a:t>name@example.com</a:t>
             </a:r>
           </a:p>
         </p:txBody>
@@ -3431,7 +3380,7 @@
     <p:bg>
       <p:bgPr>
         <a:solidFill>
-          <a:srgbClr val="FBEEF0"/>
+          <a:srgbClr val="F8F0FF"/>
         </a:solidFill>
         <a:effectLst/>
       </p:bgPr>
@@ -3451,14 +3400,14 @@
         </p:nvSpPr>
         <p:spPr>
           <a:xfrm>
-            <a:off x="1192320" y="250560"/>
-            <a:ext cx="855360" cy="855360"/>
+            <a:off x="1591200" y="511200"/>
+            <a:ext cx="57600" cy="57600"/>
           </a:xfrm>
           <a:prstGeom prst="ellipse">
             <a:avLst/>
           </a:prstGeom>
           <a:solidFill>
-            <a:srgbClr val="AE2934"/>
+            <a:srgbClr val="B66DFF"/>
           </a:solidFill>
           <a:ln>
             <a:noFill/>
@@ -3474,107 +3423,14 @@
       </p:sp>
       <p:sp>
         <p:nvSpPr>
-          <p:cNvPr id="3" name="Rounded Rectangle 2"/>
-          <p:cNvSpPr/>
+          <p:cNvPr id="3" name="텍스트"/>
+          <p:cNvSpPr txBox="1"/>
           <p:nvPr/>
         </p:nvSpPr>
         <p:spPr>
           <a:xfrm>
-            <a:off x="1414080" y="1090080"/>
-            <a:ext cx="411840" cy="253440"/>
-          </a:xfrm>
-          <a:prstGeom prst="roundRect">
-            <a:avLst>
-              <a:gd name="adj" fmla="val 18750"/>
-            </a:avLst>
-          </a:prstGeom>
-          <a:solidFill>
-            <a:srgbClr val="F8DBDD"/>
-          </a:solidFill>
-          <a:ln>
-            <a:noFill/>
-          </a:ln>
-        </p:spPr>
-        <p:txBody>
-          <a:bodyPr rtlCol="0" anchor="ctr"/>
-          <a:lstStyle/>
-          <a:p>
-            <a:pPr algn="ctr"/>
-          </a:p>
-        </p:txBody>
-      </p:sp>
-      <p:sp>
-        <p:nvSpPr>
-          <p:cNvPr id="4" name="Rounded Rectangle 3"/>
-          <p:cNvSpPr/>
-          <p:nvPr/>
-        </p:nvSpPr>
-        <p:spPr>
-          <a:xfrm>
-            <a:off x="1477440" y="1391040"/>
-            <a:ext cx="285120" cy="142560"/>
-          </a:xfrm>
-          <a:prstGeom prst="roundRect">
-            <a:avLst>
-              <a:gd name="adj" fmla="val 33333"/>
-            </a:avLst>
-          </a:prstGeom>
-          <a:solidFill>
-            <a:srgbClr val="F8DBDD"/>
-          </a:solidFill>
-          <a:ln>
-            <a:noFill/>
-          </a:ln>
-        </p:spPr>
-        <p:txBody>
-          <a:bodyPr rtlCol="0" anchor="ctr"/>
-          <a:lstStyle/>
-          <a:p>
-            <a:pPr algn="ctr"/>
-          </a:p>
-        </p:txBody>
-      </p:sp>
-      <p:sp>
-        <p:nvSpPr>
-          <p:cNvPr id="5" name="Rectangle 4"/>
-          <p:cNvSpPr/>
-          <p:nvPr/>
-        </p:nvSpPr>
-        <p:spPr>
-          <a:xfrm>
-            <a:off x="0" y="0"/>
-            <a:ext cx="3240000" cy="1800000"/>
-          </a:xfrm>
-          <a:prstGeom prst="rect">
-            <a:avLst/>
-          </a:prstGeom>
-          <a:solidFill>
-            <a:srgbClr val="FBEEF0">
-              <a:alpha val="90000"/>
-            </a:srgbClr>
-          </a:solidFill>
-          <a:ln>
-            <a:noFill/>
-          </a:ln>
-        </p:spPr>
-        <p:txBody>
-          <a:bodyPr rtlCol="0" anchor="ctr"/>
-          <a:lstStyle/>
-          <a:p>
-            <a:pPr algn="ctr"/>
-          </a:p>
-        </p:txBody>
-      </p:sp>
-      <p:sp>
-        <p:nvSpPr>
-          <p:cNvPr id="6" name="텍스트"/>
-          <p:cNvSpPr txBox="1"/>
-          <p:nvPr/>
-        </p:nvSpPr>
-        <p:spPr>
-          <a:xfrm>
-            <a:off x="396000" y="612000"/>
-            <a:ext cx="2448000" cy="432000"/>
+            <a:off x="396000" y="684000"/>
+            <a:ext cx="2448000" cy="504000"/>
           </a:xfrm>
           <a:prstGeom prst="rect">
             <a:avLst/>
@@ -3582,7 +3438,7 @@
           <a:noFill/>
         </p:spPr>
         <p:txBody>
-          <a:bodyPr wrap="square" lIns="0" rIns="0" tIns="0" bIns="0" anchor="ctr">
+          <a:bodyPr wrap="square" lIns="0" rIns="0" tIns="0" bIns="0" anchor="t">
             <a:spAutoFit/>
           </a:bodyPr>
           <a:lstStyle/>
@@ -3595,10 +3451,10 @@
             <a:r>
               <a:rPr sz="1200" b="1">
                 <a:solidFill>
-                  <a:srgbClr val="5B151B"/>
+                  <a:srgbClr val="12151C"/>
                 </a:solidFill>
-                <a:latin typeface="바탕"/>
-                <a:ea typeface="바탕"/>
+                <a:latin typeface="맑은 고딕"/>
+                <a:ea typeface="맑은 고딕"/>
               </a:rPr>
               <a:t>일의 품격을 지켜 가겠습니다</a:t>
             </a:r>
@@ -3607,43 +3463,14 @@
       </p:sp>
       <p:sp>
         <p:nvSpPr>
-          <p:cNvPr id="7" name="Rectangle 6"/>
-          <p:cNvSpPr/>
+          <p:cNvPr id="4" name="텍스트"/>
+          <p:cNvSpPr txBox="1"/>
           <p:nvPr/>
         </p:nvSpPr>
         <p:spPr>
           <a:xfrm>
-            <a:off x="1512000" y="1173600"/>
-            <a:ext cx="216000" cy="10800"/>
-          </a:xfrm>
-          <a:prstGeom prst="rect">
-            <a:avLst/>
-          </a:prstGeom>
-          <a:solidFill>
-            <a:srgbClr val="AE2934"/>
-          </a:solidFill>
-          <a:ln>
-            <a:noFill/>
-          </a:ln>
-        </p:spPr>
-        <p:txBody>
-          <a:bodyPr rtlCol="0" anchor="ctr"/>
-          <a:lstStyle/>
-          <a:p>
-            <a:pPr algn="ctr"/>
-          </a:p>
-        </p:txBody>
-      </p:sp>
-      <p:sp>
-        <p:nvSpPr>
-          <p:cNvPr id="8" name="텍스트"/>
-          <p:cNvSpPr txBox="1"/>
-          <p:nvPr/>
-        </p:nvSpPr>
-        <p:spPr>
-          <a:xfrm>
-            <a:off x="360000" y="1288800"/>
-            <a:ext cx="2520000" cy="108000"/>
+            <a:off x="360000" y="1339200"/>
+            <a:ext cx="2520000" cy="123826"/>
           </a:xfrm>
           <a:prstGeom prst="rect">
             <a:avLst/>
@@ -3658,13 +3485,13 @@
           <a:p>
             <a:pPr algn="ctr">
               <a:lnSpc>
-                <a:spcPts val="1087"/>
+                <a:spcPts val="942"/>
               </a:lnSpc>
             </a:pPr>
             <a:r>
-              <a:rPr sz="750" b="1" spc="300">
+              <a:rPr sz="650" b="1" spc="300">
                 <a:solidFill>
-                  <a:srgbClr val="8C5C61"/>
+                  <a:srgbClr val="503672"/>
                 </a:solidFill>
                 <a:latin typeface="맑은 고딕"/>
                 <a:ea typeface="맑은 고딕"/>

--- a/public/fun/cards/office/office-42.pptx
+++ b/public/fun/cards/office/office-42.pptx
@@ -3105,8 +3105,8 @@
         </p:nvSpPr>
         <p:spPr>
           <a:xfrm>
-            <a:off x="252000" y="223200"/>
-            <a:ext cx="2016000" cy="133351"/>
+            <a:off x="252000" y="252000"/>
+            <a:ext cx="1512000" cy="123826"/>
           </a:xfrm>
           <a:prstGeom prst="rect">
             <a:avLst/>
@@ -3121,11 +3121,11 @@
           <a:p>
             <a:pPr algn="l">
               <a:lnSpc>
-                <a:spcPts val="1015"/>
+                <a:spcPts val="942"/>
               </a:lnSpc>
             </a:pPr>
             <a:r>
-              <a:rPr sz="700" b="1" spc="200">
+              <a:rPr sz="650" b="1" spc="220">
                 <a:solidFill>
                   <a:srgbClr val="6B7280"/>
                 </a:solidFill>
@@ -3137,16 +3137,37 @@
           </a:p>
         </p:txBody>
       </p:sp>
-      <p:sp>
-        <p:nvSpPr>
-          <p:cNvPr id="3" name="텍스트"/>
+      <p:cxnSp>
+        <p:nvCxnSpPr>
+          <p:cNvPr id="3" name="Connector 2"/>
+          <p:cNvCxnSpPr/>
+          <p:nvPr/>
+        </p:nvCxnSpPr>
+        <p:spPr>
+          <a:xfrm>
+            <a:off x="252000" y="388800"/>
+            <a:ext cx="2736000" cy="0"/>
+          </a:xfrm>
+          <a:prstGeom prst="line">
+            <a:avLst/>
+          </a:prstGeom>
+          <a:ln w="3600">
+            <a:solidFill>
+              <a:srgbClr val="DCDFE4"/>
+            </a:solidFill>
+          </a:ln>
+        </p:spPr>
+      </p:cxnSp>
+      <p:sp>
+        <p:nvSpPr>
+          <p:cNvPr id="4" name="텍스트"/>
           <p:cNvSpPr txBox="1"/>
           <p:nvPr/>
         </p:nvSpPr>
         <p:spPr>
           <a:xfrm>
-            <a:off x="252000" y="468000"/>
-            <a:ext cx="2520000" cy="360000"/>
+            <a:off x="252000" y="576000"/>
+            <a:ext cx="1800000" cy="237600"/>
           </a:xfrm>
           <a:prstGeom prst="rect">
             <a:avLst/>
@@ -3161,11 +3182,11 @@
           <a:p>
             <a:pPr algn="l">
               <a:lnSpc>
-                <a:spcPts val="3190"/>
+                <a:spcPts val="1957"/>
               </a:lnSpc>
             </a:pPr>
             <a:r>
-              <a:rPr sz="2200" b="1">
+              <a:rPr sz="1350" b="1" spc="120">
                 <a:solidFill>
                   <a:srgbClr val="12151C"/>
                 </a:solidFill>
@@ -3179,14 +3200,14 @@
       </p:sp>
       <p:sp>
         <p:nvSpPr>
-          <p:cNvPr id="4" name="텍스트"/>
+          <p:cNvPr id="5" name="텍스트"/>
           <p:cNvSpPr txBox="1"/>
           <p:nvPr/>
         </p:nvSpPr>
         <p:spPr>
           <a:xfrm>
-            <a:off x="252000" y="871200"/>
-            <a:ext cx="2520000" cy="171451"/>
+            <a:off x="252000" y="828000"/>
+            <a:ext cx="1800000" cy="133351"/>
           </a:xfrm>
           <a:prstGeom prst="rect">
             <a:avLst/>
@@ -3201,11 +3222,11 @@
           <a:p>
             <a:pPr algn="l">
               <a:lnSpc>
-                <a:spcPts val="1305"/>
+                <a:spcPts val="1015"/>
               </a:lnSpc>
             </a:pPr>
             <a:r>
-              <a:rPr sz="900" b="0">
+              <a:rPr sz="700" b="0" spc="60">
                 <a:solidFill>
                   <a:srgbClr val="6B7280"/>
                 </a:solidFill>
@@ -3219,14 +3240,14 @@
       </p:sp>
       <p:sp>
         <p:nvSpPr>
-          <p:cNvPr id="5" name="텍스트"/>
+          <p:cNvPr id="6" name="텍스트"/>
           <p:cNvSpPr txBox="1"/>
           <p:nvPr/>
         </p:nvSpPr>
         <p:spPr>
           <a:xfrm>
-            <a:off x="252000" y="1216800"/>
-            <a:ext cx="2520000" cy="129541"/>
+            <a:off x="252000" y="1036800"/>
+            <a:ext cx="2520000" cy="123826"/>
           </a:xfrm>
           <a:prstGeom prst="rect">
             <a:avLst/>
@@ -3241,11 +3262,11 @@
           <a:p>
             <a:pPr algn="l">
               <a:lnSpc>
-                <a:spcPts val="986"/>
+                <a:spcPts val="942"/>
               </a:lnSpc>
             </a:pPr>
             <a:r>
-              <a:rPr sz="680" b="0">
+              <a:rPr sz="650" b="0">
                 <a:solidFill>
                   <a:srgbClr val="6B7280"/>
                 </a:solidFill>
@@ -3259,14 +3280,14 @@
       </p:sp>
       <p:sp>
         <p:nvSpPr>
-          <p:cNvPr id="6" name="Rectangle 5"/>
+          <p:cNvPr id="7" name="Rectangle 6"/>
           <p:cNvSpPr/>
           <p:nvPr/>
         </p:nvSpPr>
         <p:spPr>
           <a:xfrm>
-            <a:off x="0" y="1476000"/>
-            <a:ext cx="3240000" cy="324000"/>
+            <a:off x="0" y="1339200"/>
+            <a:ext cx="3240000" cy="460800"/>
           </a:xfrm>
           <a:prstGeom prst="rect">
             <a:avLst/>
@@ -3288,14 +3309,14 @@
       </p:sp>
       <p:sp>
         <p:nvSpPr>
-          <p:cNvPr id="7" name="텍스트"/>
+          <p:cNvPr id="8" name="텍스트"/>
           <p:cNvSpPr txBox="1"/>
           <p:nvPr/>
         </p:nvSpPr>
         <p:spPr>
           <a:xfrm>
-            <a:off x="252000" y="1569600"/>
-            <a:ext cx="1296000" cy="133351"/>
+            <a:off x="252000" y="1476000"/>
+            <a:ext cx="936000" cy="91441"/>
           </a:xfrm>
           <a:prstGeom prst="rect">
             <a:avLst/>
@@ -3310,11 +3331,53 @@
           <a:p>
             <a:pPr algn="l">
               <a:lnSpc>
-                <a:spcPts val="1015"/>
+                <a:spcPts val="696"/>
               </a:lnSpc>
             </a:pPr>
             <a:r>
-              <a:rPr sz="700" b="1">
+              <a:rPr sz="480" b="1" spc="140">
+                <a:solidFill>
+                  <a:srgbClr val="12151C">
+                    <a:alpha val="70000"/>
+                  </a:srgbClr>
+                </a:solidFill>
+                <a:latin typeface="맑은 고딕"/>
+                <a:ea typeface="맑은 고딕"/>
+              </a:rPr>
+              <a:t>TEL</a:t>
+            </a:r>
+          </a:p>
+        </p:txBody>
+      </p:sp>
+      <p:sp>
+        <p:nvSpPr>
+          <p:cNvPr id="9" name="텍스트"/>
+          <p:cNvSpPr txBox="1"/>
+          <p:nvPr/>
+        </p:nvSpPr>
+        <p:spPr>
+          <a:xfrm>
+            <a:off x="252000" y="1576800"/>
+            <a:ext cx="936000" cy="123826"/>
+          </a:xfrm>
+          <a:prstGeom prst="rect">
+            <a:avLst/>
+          </a:prstGeom>
+          <a:noFill/>
+        </p:spPr>
+        <p:txBody>
+          <a:bodyPr wrap="square" lIns="0" rIns="0" tIns="0" bIns="0" anchor="t">
+            <a:spAutoFit/>
+          </a:bodyPr>
+          <a:lstStyle/>
+          <a:p>
+            <a:pPr algn="l">
+              <a:lnSpc>
+                <a:spcPts val="942"/>
+              </a:lnSpc>
+            </a:pPr>
+            <a:r>
+              <a:rPr sz="650" b="1">
                 <a:solidFill>
                   <a:srgbClr val="12151C"/>
                 </a:solidFill>
@@ -3328,14 +3391,14 @@
       </p:sp>
       <p:sp>
         <p:nvSpPr>
-          <p:cNvPr id="8" name="텍스트"/>
+          <p:cNvPr id="10" name="텍스트"/>
           <p:cNvSpPr txBox="1"/>
           <p:nvPr/>
         </p:nvSpPr>
         <p:spPr>
           <a:xfrm>
-            <a:off x="1656000" y="1569600"/>
-            <a:ext cx="1368000" cy="133351"/>
+            <a:off x="1188000" y="1476000"/>
+            <a:ext cx="1080000" cy="91441"/>
           </a:xfrm>
           <a:prstGeom prst="rect">
             <a:avLst/>
@@ -3350,11 +3413,53 @@
           <a:p>
             <a:pPr algn="l">
               <a:lnSpc>
-                <a:spcPts val="1015"/>
+                <a:spcPts val="696"/>
               </a:lnSpc>
             </a:pPr>
             <a:r>
-              <a:rPr sz="700" b="1">
+              <a:rPr sz="480" b="1" spc="140">
+                <a:solidFill>
+                  <a:srgbClr val="12151C">
+                    <a:alpha val="70000"/>
+                  </a:srgbClr>
+                </a:solidFill>
+                <a:latin typeface="맑은 고딕"/>
+                <a:ea typeface="맑은 고딕"/>
+              </a:rPr>
+              <a:t>MAIL</a:t>
+            </a:r>
+          </a:p>
+        </p:txBody>
+      </p:sp>
+      <p:sp>
+        <p:nvSpPr>
+          <p:cNvPr id="11" name="텍스트"/>
+          <p:cNvSpPr txBox="1"/>
+          <p:nvPr/>
+        </p:nvSpPr>
+        <p:spPr>
+          <a:xfrm>
+            <a:off x="1188000" y="1576800"/>
+            <a:ext cx="1080000" cy="123826"/>
+          </a:xfrm>
+          <a:prstGeom prst="rect">
+            <a:avLst/>
+          </a:prstGeom>
+          <a:noFill/>
+        </p:spPr>
+        <p:txBody>
+          <a:bodyPr wrap="square" lIns="0" rIns="0" tIns="0" bIns="0" anchor="t">
+            <a:spAutoFit/>
+          </a:bodyPr>
+          <a:lstStyle/>
+          <a:p>
+            <a:pPr algn="l">
+              <a:lnSpc>
+                <a:spcPts val="942"/>
+              </a:lnSpc>
+            </a:pPr>
+            <a:r>
+              <a:rPr sz="650" b="1">
                 <a:solidFill>
                   <a:srgbClr val="12151C"/>
                 </a:solidFill>
@@ -3366,6 +3471,27 @@
           </a:p>
         </p:txBody>
       </p:sp>
+      <p:cxnSp>
+        <p:nvCxnSpPr>
+          <p:cNvPr id="12" name="Connector 11"/>
+          <p:cNvCxnSpPr/>
+          <p:nvPr/>
+        </p:nvCxnSpPr>
+        <p:spPr>
+          <a:xfrm>
+            <a:off x="1108800" y="1468800"/>
+            <a:ext cx="0" cy="208800"/>
+          </a:xfrm>
+          <a:prstGeom prst="line">
+            <a:avLst/>
+          </a:prstGeom>
+          <a:ln w="3600">
+            <a:solidFill>
+              <a:srgbClr val="12151C"/>
+            </a:solidFill>
+          </a:ln>
+        </p:spPr>
+      </p:cxnSp>
     </p:spTree>
   </p:cSld>
   <p:clrMapOvr>
@@ -3392,18 +3518,226 @@
         <p:nvPr/>
       </p:nvGrpSpPr>
       <p:grpSpPr/>
-      <p:sp>
-        <p:nvSpPr>
-          <p:cNvPr id="2" name="Oval 1"/>
+      <p:cxnSp>
+        <p:nvCxnSpPr>
+          <p:cNvPr id="2" name="Connector 1"/>
+          <p:cNvCxnSpPr/>
+          <p:nvPr/>
+        </p:nvCxnSpPr>
+        <p:spPr>
+          <a:xfrm>
+            <a:off x="93600" y="122400"/>
+            <a:ext cx="57600" cy="0"/>
+          </a:xfrm>
+          <a:prstGeom prst="line">
+            <a:avLst/>
+          </a:prstGeom>
+          <a:ln w="3600">
+            <a:solidFill>
+              <a:srgbClr val="EBD6FF"/>
+            </a:solidFill>
+          </a:ln>
+        </p:spPr>
+      </p:cxnSp>
+      <p:cxnSp>
+        <p:nvCxnSpPr>
+          <p:cNvPr id="3" name="Connector 2"/>
+          <p:cNvCxnSpPr/>
+          <p:nvPr/>
+        </p:nvCxnSpPr>
+        <p:spPr>
+          <a:xfrm>
+            <a:off x="122400" y="93600"/>
+            <a:ext cx="0" cy="57600"/>
+          </a:xfrm>
+          <a:prstGeom prst="line">
+            <a:avLst/>
+          </a:prstGeom>
+          <a:ln w="3600">
+            <a:solidFill>
+              <a:srgbClr val="EBD6FF"/>
+            </a:solidFill>
+          </a:ln>
+        </p:spPr>
+      </p:cxnSp>
+      <p:cxnSp>
+        <p:nvCxnSpPr>
+          <p:cNvPr id="4" name="Connector 3"/>
+          <p:cNvCxnSpPr/>
+          <p:nvPr/>
+        </p:nvCxnSpPr>
+        <p:spPr>
+          <a:xfrm>
+            <a:off x="3088800" y="122400"/>
+            <a:ext cx="57600" cy="0"/>
+          </a:xfrm>
+          <a:prstGeom prst="line">
+            <a:avLst/>
+          </a:prstGeom>
+          <a:ln w="3600">
+            <a:solidFill>
+              <a:srgbClr val="EBD6FF"/>
+            </a:solidFill>
+          </a:ln>
+        </p:spPr>
+      </p:cxnSp>
+      <p:cxnSp>
+        <p:nvCxnSpPr>
+          <p:cNvPr id="5" name="Connector 4"/>
+          <p:cNvCxnSpPr/>
+          <p:nvPr/>
+        </p:nvCxnSpPr>
+        <p:spPr>
+          <a:xfrm>
+            <a:off x="3117600" y="93600"/>
+            <a:ext cx="0" cy="57600"/>
+          </a:xfrm>
+          <a:prstGeom prst="line">
+            <a:avLst/>
+          </a:prstGeom>
+          <a:ln w="3600">
+            <a:solidFill>
+              <a:srgbClr val="EBD6FF"/>
+            </a:solidFill>
+          </a:ln>
+        </p:spPr>
+      </p:cxnSp>
+      <p:cxnSp>
+        <p:nvCxnSpPr>
+          <p:cNvPr id="6" name="Connector 5"/>
+          <p:cNvCxnSpPr/>
+          <p:nvPr/>
+        </p:nvCxnSpPr>
+        <p:spPr>
+          <a:xfrm>
+            <a:off x="93600" y="1677600"/>
+            <a:ext cx="57600" cy="0"/>
+          </a:xfrm>
+          <a:prstGeom prst="line">
+            <a:avLst/>
+          </a:prstGeom>
+          <a:ln w="3600">
+            <a:solidFill>
+              <a:srgbClr val="EBD6FF"/>
+            </a:solidFill>
+          </a:ln>
+        </p:spPr>
+      </p:cxnSp>
+      <p:cxnSp>
+        <p:nvCxnSpPr>
+          <p:cNvPr id="7" name="Connector 6"/>
+          <p:cNvCxnSpPr/>
+          <p:nvPr/>
+        </p:nvCxnSpPr>
+        <p:spPr>
+          <a:xfrm>
+            <a:off x="122400" y="1648800"/>
+            <a:ext cx="0" cy="57600"/>
+          </a:xfrm>
+          <a:prstGeom prst="line">
+            <a:avLst/>
+          </a:prstGeom>
+          <a:ln w="3600">
+            <a:solidFill>
+              <a:srgbClr val="EBD6FF"/>
+            </a:solidFill>
+          </a:ln>
+        </p:spPr>
+      </p:cxnSp>
+      <p:cxnSp>
+        <p:nvCxnSpPr>
+          <p:cNvPr id="8" name="Connector 7"/>
+          <p:cNvCxnSpPr/>
+          <p:nvPr/>
+        </p:nvCxnSpPr>
+        <p:spPr>
+          <a:xfrm>
+            <a:off x="3088800" y="1677600"/>
+            <a:ext cx="57600" cy="0"/>
+          </a:xfrm>
+          <a:prstGeom prst="line">
+            <a:avLst/>
+          </a:prstGeom>
+          <a:ln w="3600">
+            <a:solidFill>
+              <a:srgbClr val="EBD6FF"/>
+            </a:solidFill>
+          </a:ln>
+        </p:spPr>
+      </p:cxnSp>
+      <p:cxnSp>
+        <p:nvCxnSpPr>
+          <p:cNvPr id="9" name="Connector 8"/>
+          <p:cNvCxnSpPr/>
+          <p:nvPr/>
+        </p:nvCxnSpPr>
+        <p:spPr>
+          <a:xfrm>
+            <a:off x="3117600" y="1648800"/>
+            <a:ext cx="0" cy="57600"/>
+          </a:xfrm>
+          <a:prstGeom prst="line">
+            <a:avLst/>
+          </a:prstGeom>
+          <a:ln w="3600">
+            <a:solidFill>
+              <a:srgbClr val="EBD6FF"/>
+            </a:solidFill>
+          </a:ln>
+        </p:spPr>
+      </p:cxnSp>
+      <p:sp>
+        <p:nvSpPr>
+          <p:cNvPr id="10" name="텍스트"/>
+          <p:cNvSpPr txBox="1"/>
+          <p:nvPr/>
+        </p:nvSpPr>
+        <p:spPr>
+          <a:xfrm>
+            <a:off x="360000" y="331200"/>
+            <a:ext cx="2520000" cy="99061"/>
+          </a:xfrm>
+          <a:prstGeom prst="rect">
+            <a:avLst/>
+          </a:prstGeom>
+          <a:noFill/>
+        </p:spPr>
+        <p:txBody>
+          <a:bodyPr wrap="square" lIns="0" rIns="0" tIns="0" bIns="0" anchor="t">
+            <a:spAutoFit/>
+          </a:bodyPr>
+          <a:lstStyle/>
+          <a:p>
+            <a:pPr algn="ctr">
+              <a:lnSpc>
+                <a:spcPts val="754"/>
+              </a:lnSpc>
+            </a:pPr>
+            <a:r>
+              <a:rPr sz="520" b="1" spc="240">
+                <a:solidFill>
+                  <a:srgbClr val="503672"/>
+                </a:solidFill>
+                <a:latin typeface="맑은 고딕"/>
+                <a:ea typeface="맑은 고딕"/>
+              </a:rPr>
+              <a:t>담당 업무</a:t>
+            </a:r>
+          </a:p>
+        </p:txBody>
+      </p:sp>
+      <p:sp>
+        <p:nvSpPr>
+          <p:cNvPr id="11" name="Rectangle 10"/>
           <p:cNvSpPr/>
           <p:nvPr/>
         </p:nvSpPr>
         <p:spPr>
           <a:xfrm>
-            <a:off x="1591200" y="511200"/>
-            <a:ext cx="57600" cy="57600"/>
-          </a:xfrm>
-          <a:prstGeom prst="ellipse">
+            <a:off x="1530000" y="453600"/>
+            <a:ext cx="180000" cy="14400"/>
+          </a:xfrm>
+          <a:prstGeom prst="rect">
             <a:avLst/>
           </a:prstGeom>
           <a:solidFill>
@@ -3423,14 +3757,14 @@
       </p:sp>
       <p:sp>
         <p:nvSpPr>
-          <p:cNvPr id="3" name="텍스트"/>
+          <p:cNvPr id="12" name="텍스트"/>
           <p:cNvSpPr txBox="1"/>
           <p:nvPr/>
         </p:nvSpPr>
         <p:spPr>
           <a:xfrm>
-            <a:off x="396000" y="684000"/>
-            <a:ext cx="2448000" cy="504000"/>
+            <a:off x="360000" y="684000"/>
+            <a:ext cx="630000" cy="216000"/>
           </a:xfrm>
           <a:prstGeom prst="rect">
             <a:avLst/>
@@ -3438,38 +3772,322 @@
           <a:noFill/>
         </p:spPr>
         <p:txBody>
-          <a:bodyPr wrap="square" lIns="0" rIns="0" tIns="0" bIns="0" anchor="t">
+          <a:bodyPr wrap="square" lIns="0" rIns="0" tIns="0" bIns="0" anchor="ctr">
             <a:spAutoFit/>
           </a:bodyPr>
           <a:lstStyle/>
           <a:p>
             <a:pPr algn="ctr">
               <a:lnSpc>
-                <a:spcPts val="1739"/>
+                <a:spcPts val="1015"/>
               </a:lnSpc>
             </a:pPr>
             <a:r>
-              <a:rPr sz="1200" b="1">
+              <a:rPr sz="700" b="1">
                 <a:solidFill>
                   <a:srgbClr val="12151C"/>
                 </a:solidFill>
                 <a:latin typeface="맑은 고딕"/>
                 <a:ea typeface="맑은 고딕"/>
               </a:rPr>
-              <a:t>일의 품격을 지켜 가겠습니다</a:t>
-            </a:r>
-          </a:p>
-        </p:txBody>
-      </p:sp>
-      <p:sp>
-        <p:nvSpPr>
-          <p:cNvPr id="4" name="텍스트"/>
+              <a:t>디자인</a:t>
+            </a:r>
+          </a:p>
+        </p:txBody>
+      </p:sp>
+      <p:sp>
+        <p:nvSpPr>
+          <p:cNvPr id="13" name="텍스트"/>
           <p:cNvSpPr txBox="1"/>
           <p:nvPr/>
         </p:nvSpPr>
         <p:spPr>
           <a:xfrm>
-            <a:off x="360000" y="1339200"/>
+            <a:off x="990000" y="684000"/>
+            <a:ext cx="630000" cy="216000"/>
+          </a:xfrm>
+          <a:prstGeom prst="rect">
+            <a:avLst/>
+          </a:prstGeom>
+          <a:noFill/>
+        </p:spPr>
+        <p:txBody>
+          <a:bodyPr wrap="square" lIns="0" rIns="0" tIns="0" bIns="0" anchor="ctr">
+            <a:spAutoFit/>
+          </a:bodyPr>
+          <a:lstStyle/>
+          <a:p>
+            <a:pPr algn="ctr">
+              <a:lnSpc>
+                <a:spcPts val="1015"/>
+              </a:lnSpc>
+            </a:pPr>
+            <a:r>
+              <a:rPr sz="700" b="1">
+                <a:solidFill>
+                  <a:srgbClr val="12151C"/>
+                </a:solidFill>
+                <a:latin typeface="맑은 고딕"/>
+                <a:ea typeface="맑은 고딕"/>
+              </a:rPr>
+              <a:t>고객 응대</a:t>
+            </a:r>
+          </a:p>
+        </p:txBody>
+      </p:sp>
+      <p:cxnSp>
+        <p:nvCxnSpPr>
+          <p:cNvPr id="14" name="Connector 13"/>
+          <p:cNvCxnSpPr/>
+          <p:nvPr/>
+        </p:nvCxnSpPr>
+        <p:spPr>
+          <a:xfrm>
+            <a:off x="990000" y="676800"/>
+            <a:ext cx="0" cy="230400"/>
+          </a:xfrm>
+          <a:prstGeom prst="line">
+            <a:avLst/>
+          </a:prstGeom>
+          <a:ln w="3600">
+            <a:solidFill>
+              <a:srgbClr val="EBD6FF"/>
+            </a:solidFill>
+          </a:ln>
+        </p:spPr>
+      </p:cxnSp>
+      <p:sp>
+        <p:nvSpPr>
+          <p:cNvPr id="15" name="텍스트"/>
+          <p:cNvSpPr txBox="1"/>
+          <p:nvPr/>
+        </p:nvSpPr>
+        <p:spPr>
+          <a:xfrm>
+            <a:off x="1620000" y="684000"/>
+            <a:ext cx="630000" cy="216000"/>
+          </a:xfrm>
+          <a:prstGeom prst="rect">
+            <a:avLst/>
+          </a:prstGeom>
+          <a:noFill/>
+        </p:spPr>
+        <p:txBody>
+          <a:bodyPr wrap="square" lIns="0" rIns="0" tIns="0" bIns="0" anchor="ctr">
+            <a:spAutoFit/>
+          </a:bodyPr>
+          <a:lstStyle/>
+          <a:p>
+            <a:pPr algn="ctr">
+              <a:lnSpc>
+                <a:spcPts val="1015"/>
+              </a:lnSpc>
+            </a:pPr>
+            <a:r>
+              <a:rPr sz="700" b="1">
+                <a:solidFill>
+                  <a:srgbClr val="12151C"/>
+                </a:solidFill>
+                <a:latin typeface="맑은 고딕"/>
+                <a:ea typeface="맑은 고딕"/>
+              </a:rPr>
+              <a:t>계약 관리</a:t>
+            </a:r>
+          </a:p>
+        </p:txBody>
+      </p:sp>
+      <p:cxnSp>
+        <p:nvCxnSpPr>
+          <p:cNvPr id="16" name="Connector 15"/>
+          <p:cNvCxnSpPr/>
+          <p:nvPr/>
+        </p:nvCxnSpPr>
+        <p:spPr>
+          <a:xfrm>
+            <a:off x="1620000" y="676800"/>
+            <a:ext cx="0" cy="230400"/>
+          </a:xfrm>
+          <a:prstGeom prst="line">
+            <a:avLst/>
+          </a:prstGeom>
+          <a:ln w="3600">
+            <a:solidFill>
+              <a:srgbClr val="EBD6FF"/>
+            </a:solidFill>
+          </a:ln>
+        </p:spPr>
+      </p:cxnSp>
+      <p:sp>
+        <p:nvSpPr>
+          <p:cNvPr id="17" name="텍스트"/>
+          <p:cNvSpPr txBox="1"/>
+          <p:nvPr/>
+        </p:nvSpPr>
+        <p:spPr>
+          <a:xfrm>
+            <a:off x="2250000" y="684000"/>
+            <a:ext cx="630000" cy="216000"/>
+          </a:xfrm>
+          <a:prstGeom prst="rect">
+            <a:avLst/>
+          </a:prstGeom>
+          <a:noFill/>
+        </p:spPr>
+        <p:txBody>
+          <a:bodyPr wrap="square" lIns="0" rIns="0" tIns="0" bIns="0" anchor="ctr">
+            <a:spAutoFit/>
+          </a:bodyPr>
+          <a:lstStyle/>
+          <a:p>
+            <a:pPr algn="ctr">
+              <a:lnSpc>
+                <a:spcPts val="1015"/>
+              </a:lnSpc>
+            </a:pPr>
+            <a:r>
+              <a:rPr sz="700" b="1">
+                <a:solidFill>
+                  <a:srgbClr val="12151C"/>
+                </a:solidFill>
+                <a:latin typeface="맑은 고딕"/>
+                <a:ea typeface="맑은 고딕"/>
+              </a:rPr>
+              <a:t>품질 관리</a:t>
+            </a:r>
+          </a:p>
+        </p:txBody>
+      </p:sp>
+      <p:cxnSp>
+        <p:nvCxnSpPr>
+          <p:cNvPr id="18" name="Connector 17"/>
+          <p:cNvCxnSpPr/>
+          <p:nvPr/>
+        </p:nvCxnSpPr>
+        <p:spPr>
+          <a:xfrm>
+            <a:off x="2250000" y="676800"/>
+            <a:ext cx="0" cy="230400"/>
+          </a:xfrm>
+          <a:prstGeom prst="line">
+            <a:avLst/>
+          </a:prstGeom>
+          <a:ln w="3600">
+            <a:solidFill>
+              <a:srgbClr val="EBD6FF"/>
+            </a:solidFill>
+          </a:ln>
+        </p:spPr>
+      </p:cxnSp>
+      <p:cxnSp>
+        <p:nvCxnSpPr>
+          <p:cNvPr id="19" name="Connector 18"/>
+          <p:cNvCxnSpPr/>
+          <p:nvPr/>
+        </p:nvCxnSpPr>
+        <p:spPr>
+          <a:xfrm>
+            <a:off x="360000" y="1159200"/>
+            <a:ext cx="2520000" cy="0"/>
+          </a:xfrm>
+          <a:prstGeom prst="line">
+            <a:avLst/>
+          </a:prstGeom>
+          <a:ln w="3600">
+            <a:solidFill>
+              <a:srgbClr val="EBD6FF"/>
+            </a:solidFill>
+          </a:ln>
+        </p:spPr>
+      </p:cxnSp>
+      <p:sp>
+        <p:nvSpPr>
+          <p:cNvPr id="20" name="텍스트"/>
+          <p:cNvSpPr txBox="1"/>
+          <p:nvPr/>
+        </p:nvSpPr>
+        <p:spPr>
+          <a:xfrm>
+            <a:off x="360000" y="1245600"/>
+            <a:ext cx="1224000" cy="118111"/>
+          </a:xfrm>
+          <a:prstGeom prst="rect">
+            <a:avLst/>
+          </a:prstGeom>
+          <a:noFill/>
+        </p:spPr>
+        <p:txBody>
+          <a:bodyPr wrap="square" lIns="0" rIns="0" tIns="0" bIns="0" anchor="t">
+            <a:spAutoFit/>
+          </a:bodyPr>
+          <a:lstStyle/>
+          <a:p>
+            <a:pPr algn="ctr">
+              <a:lnSpc>
+                <a:spcPts val="899"/>
+              </a:lnSpc>
+            </a:pPr>
+            <a:r>
+              <a:rPr sz="620" b="0">
+                <a:solidFill>
+                  <a:srgbClr val="12151C"/>
+                </a:solidFill>
+                <a:latin typeface="맑은 고딕"/>
+                <a:ea typeface="맑은 고딕"/>
+              </a:rPr>
+              <a:t>평일 10:00 – 19:00</a:t>
+            </a:r>
+          </a:p>
+        </p:txBody>
+      </p:sp>
+      <p:sp>
+        <p:nvSpPr>
+          <p:cNvPr id="21" name="텍스트"/>
+          <p:cNvSpPr txBox="1"/>
+          <p:nvPr/>
+        </p:nvSpPr>
+        <p:spPr>
+          <a:xfrm>
+            <a:off x="1656000" y="1245600"/>
+            <a:ext cx="1224000" cy="118111"/>
+          </a:xfrm>
+          <a:prstGeom prst="rect">
+            <a:avLst/>
+          </a:prstGeom>
+          <a:noFill/>
+        </p:spPr>
+        <p:txBody>
+          <a:bodyPr wrap="square" lIns="0" rIns="0" tIns="0" bIns="0" anchor="t">
+            <a:spAutoFit/>
+          </a:bodyPr>
+          <a:lstStyle/>
+          <a:p>
+            <a:pPr algn="ctr">
+              <a:lnSpc>
+                <a:spcPts val="899"/>
+              </a:lnSpc>
+            </a:pPr>
+            <a:r>
+              <a:rPr sz="620" b="0">
+                <a:solidFill>
+                  <a:srgbClr val="12151C"/>
+                </a:solidFill>
+                <a:latin typeface="맑은 고딕"/>
+                <a:ea typeface="맑은 고딕"/>
+              </a:rPr>
+              <a:t>BLOG  blog.example.com</a:t>
+            </a:r>
+          </a:p>
+        </p:txBody>
+      </p:sp>
+      <p:sp>
+        <p:nvSpPr>
+          <p:cNvPr id="22" name="텍스트"/>
+          <p:cNvSpPr txBox="1"/>
+          <p:nvPr/>
+        </p:nvSpPr>
+        <p:spPr>
+          <a:xfrm>
+            <a:off x="360000" y="1526400"/>
             <a:ext cx="2520000" cy="123826"/>
           </a:xfrm>
           <a:prstGeom prst="rect">
@@ -3489,7 +4107,7 @@
               </a:lnSpc>
             </a:pPr>
             <a:r>
-              <a:rPr sz="650" b="1" spc="300">
+              <a:rPr sz="650" b="1" spc="220">
                 <a:solidFill>
                   <a:srgbClr val="503672"/>
                 </a:solidFill>
